--- a/Sang Nguyễn Thanh - CS2205.JAN2026.DeCuong.FinalReport.Poster.pptx
+++ b/Sang Nguyễn Thanh - CS2205.JAN2026.DeCuong.FinalReport.Poster.pptx
@@ -941,7 +941,7 @@
           <a:bodyPr lIns="0" tIns="0" rIns="0" bIns="0" anchor="t"/>
           <a:lstStyle/>
           <a:p>
-            <a:pPr algn="l">
+            <a:pPr>
               <a:defRPr sz="2025" b="1">
                 <a:solidFill>
                   <a:srgbClr val="FFFFFF"/>
@@ -952,84 +952,34 @@
               </a:defRPr>
             </a:pPr>
             <a:r>
-              <a:rPr sz="2025" b="1">
+              <a:rPr lang="vi-VN" sz="2025"/>
+              <a:t>MÔ HÌNH HỌC MÁY CẢNH BÁO SỚM CÓ GIẢI THÍCH CHO RỦI RO </a:t>
+            </a:r>
+            <a:endParaRPr lang="en-US" sz="2025"/>
+          </a:p>
+          <a:p>
+            <a:pPr>
+              <a:defRPr sz="2025" b="1">
                 <a:solidFill>
                   <a:srgbClr val="FFFFFF"/>
                 </a:solidFill>
                 <a:latin typeface="Aptos Display"/>
                 <a:ea typeface="Aptos Display"/>
                 <a:cs typeface="Aptos Display"/>
-              </a:rPr>
-              <a:t>MÔ HÌNH </a:t>
-            </a:r>
-            <a:r>
-              <a:rPr lang="en-US" sz="2025" b="1">
-                <a:solidFill>
-                  <a:srgbClr val="FFFFFF"/>
-                </a:solidFill>
-                <a:latin typeface="Aptos Display"/>
-                <a:ea typeface="Aptos Display"/>
-                <a:cs typeface="Aptos Display"/>
-              </a:rPr>
-              <a:t>HỌC MÁY </a:t>
-            </a:r>
-            <a:r>
-              <a:rPr sz="2025" b="1">
-                <a:solidFill>
-                  <a:srgbClr val="FFFFFF"/>
-                </a:solidFill>
-                <a:latin typeface="Aptos Display"/>
-                <a:ea typeface="Aptos Display"/>
-                <a:cs typeface="Aptos Display"/>
-              </a:rPr>
-              <a:t>CẢNH BÁO SỚM CÓ GIẢI THÍCH</a:t>
-            </a:r>
-          </a:p>
-          <a:p>
-            <a:pPr algn="l">
-              <a:defRPr sz="2025" b="1">
-                <a:solidFill>
-                  <a:srgbClr val="FFFFFF"/>
-                </a:solidFill>
-                <a:latin typeface="Aptos Display"/>
-                <a:ea typeface="Aptos Display"/>
-                <a:cs typeface="Aptos Display"/>
-              </a:defRPr>
-            </a:pPr>
-            <a:r>
-              <a:rPr sz="2025" b="1">
-                <a:solidFill>
-                  <a:srgbClr val="FFFFFF"/>
-                </a:solidFill>
-                <a:latin typeface="Aptos Display"/>
-                <a:ea typeface="Aptos Display"/>
-                <a:cs typeface="Aptos Display"/>
-              </a:rPr>
-              <a:t>CHO RỦI RO VƯỢT CHI PHÍ VÀ TIẾN ĐỘ DỰ ÁN</a:t>
-            </a:r>
-          </a:p>
-          <a:p>
-            <a:pPr algn="l">
-              <a:defRPr sz="2025" b="1">
-                <a:solidFill>
-                  <a:srgbClr val="FFFFFF"/>
-                </a:solidFill>
-                <a:latin typeface="Aptos Display"/>
-                <a:ea typeface="Aptos Display"/>
-                <a:cs typeface="Aptos Display"/>
-              </a:defRPr>
-            </a:pPr>
-            <a:r>
-              <a:rPr sz="2025" b="1">
-                <a:solidFill>
-                  <a:srgbClr val="FFFFFF"/>
-                </a:solidFill>
-                <a:latin typeface="Aptos Display"/>
-                <a:ea typeface="Aptos Display"/>
-                <a:cs typeface="Aptos Display"/>
-              </a:rPr>
-              <a:t>DỰA TRÊN EVM</a:t>
-            </a:r>
+              </a:defRPr>
+            </a:pPr>
+            <a:r>
+              <a:rPr lang="vi-VN" sz="2025"/>
+              <a:t>TRONG CÁC DỰ ÁN DỰA TRÊN EARNED VALUE MANAGEMENT</a:t>
+            </a:r>
+            <a:endParaRPr sz="2025" b="1">
+              <a:solidFill>
+                <a:srgbClr val="FFFFFF"/>
+              </a:solidFill>
+              <a:latin typeface="Aptos Display"/>
+              <a:ea typeface="Aptos Display"/>
+              <a:cs typeface="Aptos Display"/>
+            </a:endParaRPr>
           </a:p>
         </p:txBody>
       </p:sp>
